--- a/Apresetação/SQL.pptx
+++ b/Apresetação/SQL.pptx
@@ -5,10 +5,10 @@
     <p:sldMasterId id="2147483666" r:id="rId1"/>
   </p:sldMasterIdLst>
   <p:notesMasterIdLst>
-    <p:notesMasterId r:id="rId54"/>
+    <p:notesMasterId r:id="rId55"/>
   </p:notesMasterIdLst>
   <p:handoutMasterIdLst>
-    <p:handoutMasterId r:id="rId55"/>
+    <p:handoutMasterId r:id="rId56"/>
   </p:handoutMasterIdLst>
   <p:sldIdLst>
     <p:sldId id="2526" r:id="rId2"/>
@@ -63,41 +63,42 @@
     <p:sldId id="3203" r:id="rId51"/>
     <p:sldId id="3204" r:id="rId52"/>
     <p:sldId id="3205" r:id="rId53"/>
+    <p:sldId id="3206" r:id="rId54"/>
   </p:sldIdLst>
   <p:sldSz cx="9144000" cy="5143500" type="screen16x9"/>
   <p:notesSz cx="6858000" cy="9945688"/>
   <p:embeddedFontLst>
     <p:embeddedFont>
       <p:font typeface="Arial Unicode MS" panose="020B0604020202020204" charset="-128"/>
-      <p:regular r:id="rId56"/>
+      <p:regular r:id="rId57"/>
     </p:embeddedFont>
     <p:embeddedFont>
       <p:font typeface="Consolas" panose="020B0609020204030204" pitchFamily="49" charset="0"/>
-      <p:regular r:id="rId57"/>
-      <p:bold r:id="rId58"/>
-      <p:italic r:id="rId59"/>
-      <p:boldItalic r:id="rId60"/>
+      <p:regular r:id="rId58"/>
+      <p:bold r:id="rId59"/>
+      <p:italic r:id="rId60"/>
+      <p:boldItalic r:id="rId61"/>
     </p:embeddedFont>
     <p:embeddedFont>
       <p:font typeface="Roboto" panose="02000000000000000000" pitchFamily="2" charset="0"/>
-      <p:regular r:id="rId61"/>
-      <p:bold r:id="rId62"/>
-      <p:italic r:id="rId63"/>
-      <p:boldItalic r:id="rId64"/>
+      <p:regular r:id="rId62"/>
+      <p:bold r:id="rId63"/>
+      <p:italic r:id="rId64"/>
+      <p:boldItalic r:id="rId65"/>
     </p:embeddedFont>
     <p:embeddedFont>
       <p:font typeface="Times" panose="02020603050405020304" pitchFamily="18" charset="0"/>
-      <p:regular r:id="rId65"/>
-      <p:bold r:id="rId66"/>
-      <p:italic r:id="rId67"/>
-      <p:boldItalic r:id="rId68"/>
+      <p:regular r:id="rId66"/>
+      <p:bold r:id="rId67"/>
+      <p:italic r:id="rId68"/>
+      <p:boldItalic r:id="rId69"/>
     </p:embeddedFont>
     <p:embeddedFont>
       <p:font typeface="Verdana" panose="020B0604030504040204" pitchFamily="34" charset="0"/>
-      <p:regular r:id="rId69"/>
-      <p:bold r:id="rId70"/>
-      <p:italic r:id="rId71"/>
-      <p:boldItalic r:id="rId72"/>
+      <p:regular r:id="rId70"/>
+      <p:bold r:id="rId71"/>
+      <p:italic r:id="rId72"/>
+      <p:boldItalic r:id="rId73"/>
     </p:embeddedFont>
   </p:embeddedFontLst>
   <p:defaultTextStyle>
@@ -386,6 +387,7 @@
             <p14:sldId id="3203"/>
             <p14:sldId id="3204"/>
             <p14:sldId id="3205"/>
+            <p14:sldId id="3206"/>
           </p14:sldIdLst>
         </p14:section>
       </p14:sectionLst>
@@ -32629,6 +32631,230 @@
 </p:sld>
 </file>
 
+<file path=ppt/slides/slide53.xml><?xml version="1.0" encoding="utf-8"?>
+<p:sld xmlns:a="http://schemas.openxmlformats.org/drawingml/2006/main" xmlns:r="http://schemas.openxmlformats.org/officeDocument/2006/relationships" xmlns:p="http://schemas.openxmlformats.org/presentationml/2006/main">
+  <p:cSld>
+    <p:spTree>
+      <p:nvGrpSpPr>
+        <p:cNvPr id="1" name="">
+          <a:extLst>
+            <a:ext uri="{FF2B5EF4-FFF2-40B4-BE49-F238E27FC236}">
+              <a16:creationId xmlns:a16="http://schemas.microsoft.com/office/drawing/2014/main" id="{19D6B4DA-F73F-923B-6A73-91B600305AA0}"/>
+            </a:ext>
+          </a:extLst>
+        </p:cNvPr>
+        <p:cNvGrpSpPr/>
+        <p:nvPr/>
+      </p:nvGrpSpPr>
+      <p:grpSpPr>
+        <a:xfrm>
+          <a:off x="0" y="0"/>
+          <a:ext cx="0" cy="0"/>
+          <a:chOff x="0" y="0"/>
+          <a:chExt cx="0" cy="0"/>
+        </a:xfrm>
+      </p:grpSpPr>
+      <p:sp>
+        <p:nvSpPr>
+          <p:cNvPr id="19" name="CaixaDeTexto 18">
+            <a:extLst>
+              <a:ext uri="{FF2B5EF4-FFF2-40B4-BE49-F238E27FC236}">
+                <a16:creationId xmlns:a16="http://schemas.microsoft.com/office/drawing/2014/main" id="{3389A7C3-425D-9E7F-4824-CF35601E37C4}"/>
+              </a:ext>
+            </a:extLst>
+          </p:cNvPr>
+          <p:cNvSpPr txBox="1"/>
+          <p:nvPr/>
+        </p:nvSpPr>
+        <p:spPr>
+          <a:xfrm>
+            <a:off x="955954" y="101183"/>
+            <a:ext cx="7567041" cy="461665"/>
+          </a:xfrm>
+          <a:prstGeom prst="rect">
+            <a:avLst/>
+          </a:prstGeom>
+          <a:noFill/>
+        </p:spPr>
+        <p:txBody>
+          <a:bodyPr wrap="square">
+            <a:spAutoFit/>
+          </a:bodyPr>
+          <a:lstStyle/>
+          <a:p>
+            <a:r>
+              <a:rPr lang="en-US" sz="2400" b="1" i="1" dirty="0">
+                <a:solidFill>
+                  <a:srgbClr val="0033CC"/>
+                </a:solidFill>
+                <a:latin typeface="Verdana" panose="020B0604030504040204" pitchFamily="34" charset="0"/>
+              </a:rPr>
+              <a:t>O </a:t>
+            </a:r>
+            <a:r>
+              <a:rPr lang="en-US" sz="2400" b="1" i="1" dirty="0" err="1">
+                <a:solidFill>
+                  <a:srgbClr val="0033CC"/>
+                </a:solidFill>
+                <a:latin typeface="Verdana" panose="020B0604030504040204" pitchFamily="34" charset="0"/>
+              </a:rPr>
+              <a:t>Comando</a:t>
+            </a:r>
+            <a:r>
+              <a:rPr lang="en-US" sz="2400" b="1" i="1" dirty="0">
+                <a:solidFill>
+                  <a:srgbClr val="0033CC"/>
+                </a:solidFill>
+                <a:latin typeface="Verdana" panose="020B0604030504040204" pitchFamily="34" charset="0"/>
+              </a:rPr>
+              <a:t> SELECT</a:t>
+            </a:r>
+            <a:endParaRPr lang="pt-BR" sz="2400" b="1" i="1" dirty="0">
+              <a:solidFill>
+                <a:srgbClr val="0033CC"/>
+              </a:solidFill>
+              <a:latin typeface="Verdana" panose="020B0604030504040204" pitchFamily="34" charset="0"/>
+            </a:endParaRPr>
+          </a:p>
+        </p:txBody>
+      </p:sp>
+      <p:sp>
+        <p:nvSpPr>
+          <p:cNvPr id="6" name="CaixaDeTexto 5">
+            <a:extLst>
+              <a:ext uri="{FF2B5EF4-FFF2-40B4-BE49-F238E27FC236}">
+                <a16:creationId xmlns:a16="http://schemas.microsoft.com/office/drawing/2014/main" id="{6CF13C3E-FD13-D7CE-29C8-D83D89E13A0B}"/>
+              </a:ext>
+            </a:extLst>
+          </p:cNvPr>
+          <p:cNvSpPr txBox="1"/>
+          <p:nvPr/>
+        </p:nvSpPr>
+        <p:spPr>
+          <a:xfrm>
+            <a:off x="879753" y="820255"/>
+            <a:ext cx="7880549" cy="400110"/>
+          </a:xfrm>
+          <a:prstGeom prst="rect">
+            <a:avLst/>
+          </a:prstGeom>
+          <a:noFill/>
+        </p:spPr>
+        <p:txBody>
+          <a:bodyPr wrap="square">
+            <a:spAutoFit/>
+          </a:bodyPr>
+          <a:lstStyle/>
+          <a:p>
+            <a:endParaRPr lang="pt-BR" sz="2000" dirty="0">
+              <a:solidFill>
+                <a:schemeClr val="tx1"/>
+              </a:solidFill>
+              <a:latin typeface="Arial" panose="020B0604020202020204" pitchFamily="34" charset="0"/>
+              <a:cs typeface="Arial" panose="020B0604020202020204" pitchFamily="34" charset="0"/>
+            </a:endParaRPr>
+          </a:p>
+        </p:txBody>
+      </p:sp>
+    </p:spTree>
+    <p:extLst>
+      <p:ext uri="{BB962C8B-B14F-4D97-AF65-F5344CB8AC3E}">
+        <p14:creationId xmlns:p14="http://schemas.microsoft.com/office/powerpoint/2010/main" val="361212503"/>
+      </p:ext>
+    </p:extLst>
+  </p:cSld>
+  <p:clrMapOvr>
+    <a:masterClrMapping/>
+  </p:clrMapOvr>
+  <p:timing>
+    <p:tnLst>
+      <p:par>
+        <p:cTn id="1" dur="indefinite" restart="never" nodeType="tmRoot">
+          <p:childTnLst>
+            <p:seq concurrent="1" nextAc="seek">
+              <p:cTn id="2" dur="indefinite" nodeType="mainSeq">
+                <p:childTnLst>
+                  <p:par>
+                    <p:cTn id="3" fill="hold">
+                      <p:stCondLst>
+                        <p:cond delay="indefinite"/>
+                        <p:cond evt="onBegin" delay="0">
+                          <p:tn val="2"/>
+                        </p:cond>
+                      </p:stCondLst>
+                      <p:childTnLst>
+                        <p:par>
+                          <p:cTn id="4" fill="hold">
+                            <p:stCondLst>
+                              <p:cond delay="0"/>
+                            </p:stCondLst>
+                            <p:childTnLst>
+                              <p:par>
+                                <p:cTn id="5" presetID="1" presetClass="entr" presetSubtype="0" fill="hold" grpId="0" nodeType="withEffect" nodePh="1">
+                                  <p:stCondLst>
+                                    <p:cond delay="0"/>
+                                  </p:stCondLst>
+                                  <p:endCondLst>
+                                    <p:cond evt="begin" delay="0">
+                                      <p:tn val="5"/>
+                                    </p:cond>
+                                  </p:endCondLst>
+                                  <p:childTnLst>
+                                    <p:set>
+                                      <p:cBhvr>
+                                        <p:cTn id="6" dur="1" fill="hold">
+                                          <p:stCondLst>
+                                            <p:cond delay="0"/>
+                                          </p:stCondLst>
+                                        </p:cTn>
+                                        <p:tgtEl>
+                                          <p:spTgt spid="6"/>
+                                        </p:tgtEl>
+                                        <p:attrNameLst>
+                                          <p:attrName>style.visibility</p:attrName>
+                                        </p:attrNameLst>
+                                      </p:cBhvr>
+                                      <p:to>
+                                        <p:strVal val="visible"/>
+                                      </p:to>
+                                    </p:set>
+                                  </p:childTnLst>
+                                </p:cTn>
+                              </p:par>
+                            </p:childTnLst>
+                          </p:cTn>
+                        </p:par>
+                      </p:childTnLst>
+                    </p:cTn>
+                  </p:par>
+                </p:childTnLst>
+              </p:cTn>
+              <p:prevCondLst>
+                <p:cond evt="onPrev" delay="0">
+                  <p:tgtEl>
+                    <p:sldTgt/>
+                  </p:tgtEl>
+                </p:cond>
+              </p:prevCondLst>
+              <p:nextCondLst>
+                <p:cond evt="onNext" delay="0">
+                  <p:tgtEl>
+                    <p:sldTgt/>
+                  </p:tgtEl>
+                </p:cond>
+              </p:nextCondLst>
+            </p:seq>
+          </p:childTnLst>
+        </p:cTn>
+      </p:par>
+    </p:tnLst>
+    <p:bldLst>
+      <p:bldP spid="6" grpId="0"/>
+    </p:bldLst>
+  </p:timing>
+</p:sld>
+</file>
+
 <file path=ppt/slides/slide6.xml><?xml version="1.0" encoding="utf-8"?>
 <p:sld xmlns:a="http://schemas.openxmlformats.org/drawingml/2006/main" xmlns:r="http://schemas.openxmlformats.org/officeDocument/2006/relationships" xmlns:p="http://schemas.openxmlformats.org/presentationml/2006/main">
   <p:cSld>
